--- a/examples/anti_bribery_for_procurement_partners__upgraded.pptx
+++ b/examples/anti_bribery_for_procurement_partners__upgraded.pptx
@@ -14,6 +14,8 @@
     <p:sldId id="262" r:id="rId14"/>
     <p:sldId id="263" r:id="rId15"/>
     <p:sldId id="264" r:id="rId16"/>
+    <p:sldId id="265" r:id="rId17"/>
+    <p:sldId id="266" r:id="rId18"/>
   </p:sldIdLst>
   <p:sldSz cx="9144000" cy="6858000" type="screen4x3"/>
   <p:notesSz cx="6858000" cy="9144000"/>
@@ -3615,6 +3617,186 @@
 </p:sld>
 </file>
 
+<file path=ppt/slides/slide10.xml><?xml version="1.0" encoding="utf-8"?>
+<p:sld xmlns:a="http://schemas.openxmlformats.org/drawingml/2006/main" xmlns:p="http://schemas.openxmlformats.org/presentationml/2006/main" xmlns:r="http://schemas.openxmlformats.org/officeDocument/2006/relationships">
+  <p:cSld>
+    <p:spTree>
+      <p:nvGrpSpPr>
+        <p:cNvPr id="1" name=""/>
+        <p:cNvGrpSpPr/>
+        <p:nvPr/>
+      </p:nvGrpSpPr>
+      <p:grpSpPr/>
+      <p:sp>
+        <p:nvSpPr>
+          <p:cNvPr id="2" name="Title 1"/>
+          <p:cNvSpPr>
+            <a:spLocks noGrp="1"/>
+          </p:cNvSpPr>
+          <p:nvPr>
+            <p:ph type="title"/>
+          </p:nvPr>
+        </p:nvSpPr>
+        <p:spPr/>
+        <p:txBody>
+          <a:bodyPr/>
+          <a:lstStyle/>
+          <a:p/>
+        </p:txBody>
+      </p:sp>
+      <p:sp>
+        <p:nvSpPr>
+          <p:cNvPr id="3" name="TextBox 2"/>
+          <p:cNvSpPr txBox="1"/>
+          <p:nvPr/>
+        </p:nvSpPr>
+        <p:spPr>
+          <a:xfrm>
+            <a:off x="457200" y="1371600"/>
+            <a:ext cx="8229600" cy="4572000"/>
+          </a:xfrm>
+          <a:prstGeom prst="rect">
+            <a:avLst/>
+          </a:prstGeom>
+          <a:noFill/>
+        </p:spPr>
+        <p:txBody>
+          <a:bodyPr wrap="square">
+            <a:spAutoFit/>
+          </a:bodyPr>
+          <a:lstStyle/>
+          <a:p>
+            <a:pPr>
+              <a:defRPr sz="1800"/>
+            </a:pPr>
+            <a:r>
+              <a:t>Decline gifts that exceed the policy threshold</a:t>
+            </a:r>
+          </a:p>
+          <a:p>
+            <a:pPr>
+              <a:defRPr sz="1800"/>
+            </a:pPr>
+            <a:r>
+              <a:t>Log every received gift in the central register</a:t>
+            </a:r>
+          </a:p>
+          <a:p>
+            <a:pPr>
+              <a:defRPr sz="1800"/>
+            </a:pPr>
+            <a:r>
+              <a:t>Escalate suspected bribery to compliance within 24 hours</a:t>
+            </a:r>
+          </a:p>
+        </p:txBody>
+      </p:sp>
+    </p:spTree>
+  </p:cSld>
+  <p:clrMapOvr>
+    <a:masterClrMapping/>
+  </p:clrMapOvr>
+</p:sld>
+</file>
+
+<file path=ppt/slides/slide11.xml><?xml version="1.0" encoding="utf-8"?>
+<p:sld xmlns:a="http://schemas.openxmlformats.org/drawingml/2006/main" xmlns:p="http://schemas.openxmlformats.org/presentationml/2006/main" xmlns:r="http://schemas.openxmlformats.org/officeDocument/2006/relationships">
+  <p:cSld>
+    <p:spTree>
+      <p:nvGrpSpPr>
+        <p:cNvPr id="1" name=""/>
+        <p:cNvGrpSpPr/>
+        <p:nvPr/>
+      </p:nvGrpSpPr>
+      <p:grpSpPr/>
+      <p:sp>
+        <p:nvSpPr>
+          <p:cNvPr id="2" name="Title 1"/>
+          <p:cNvSpPr>
+            <a:spLocks noGrp="1"/>
+          </p:cNvSpPr>
+          <p:nvPr>
+            <p:ph type="title"/>
+          </p:nvPr>
+        </p:nvSpPr>
+        <p:spPr/>
+        <p:txBody>
+          <a:bodyPr/>
+          <a:lstStyle/>
+          <a:p/>
+        </p:txBody>
+      </p:sp>
+      <p:sp>
+        <p:nvSpPr>
+          <p:cNvPr id="3" name="TextBox 2"/>
+          <p:cNvSpPr txBox="1"/>
+          <p:nvPr/>
+        </p:nvSpPr>
+        <p:spPr>
+          <a:xfrm>
+            <a:off x="457200" y="1371600"/>
+            <a:ext cx="8229600" cy="4572000"/>
+          </a:xfrm>
+          <a:prstGeom prst="rect">
+            <a:avLst/>
+          </a:prstGeom>
+          <a:noFill/>
+        </p:spPr>
+        <p:txBody>
+          <a:bodyPr wrap="square">
+            <a:spAutoFit/>
+          </a:bodyPr>
+          <a:lstStyle/>
+          <a:p>
+            <a:pPr>
+              <a:defRPr sz="1800"/>
+            </a:pPr>
+            <a:r>
+              <a:t>Which gift must always be logged?</a:t>
+            </a:r>
+          </a:p>
+          <a:p>
+            <a:pPr>
+              <a:defRPr sz="1800"/>
+            </a:pPr>
+            <a:r>
+              <a:t>A. Any gift above the policy threshold</a:t>
+            </a:r>
+          </a:p>
+          <a:p>
+            <a:pPr>
+              <a:defRPr sz="1800"/>
+            </a:pPr>
+            <a:r>
+              <a:t>B. Promotional pens</a:t>
+            </a:r>
+          </a:p>
+          <a:p>
+            <a:pPr>
+              <a:defRPr sz="1800"/>
+            </a:pPr>
+            <a:r>
+              <a:t>C. Branded notebooks</a:t>
+            </a:r>
+          </a:p>
+          <a:p>
+            <a:pPr>
+              <a:defRPr sz="1800"/>
+            </a:pPr>
+            <a:r>
+              <a:t>Answer: A</a:t>
+            </a:r>
+          </a:p>
+        </p:txBody>
+      </p:sp>
+    </p:spTree>
+  </p:cSld>
+  <p:clrMapOvr>
+    <a:masterClrMapping/>
+  </p:clrMapOvr>
+</p:sld>
+</file>
+
 <file path=ppt/slides/slide2.xml><?xml version="1.0" encoding="utf-8"?>
 <p:sld xmlns:a="http://schemas.openxmlformats.org/drawingml/2006/main" xmlns:p="http://schemas.openxmlformats.org/presentationml/2006/main" xmlns:r="http://schemas.openxmlformats.org/officeDocument/2006/relationships">
   <p:cSld>
@@ -4860,7 +5042,7 @@
               <a:defRPr sz="1400" i="1"/>
             </a:pPr>
             <a:r>
-              <a:t>[image] A procurement partners reviewing a contract while declining a gift, modern office, neutral palette</a:t>
+              <a:t>[image] A diverse group of procurement partners, mixed ages and ethnicities, reviewing a contract while declining a wrapped gift; modern open-plan office, soft daylight from large windows, neutral palette, 35mm f/2.8 documentary photography</a:t>
             </a:r>
           </a:p>
         </p:txBody>
